--- a/PresentazioneIDS.pptx
+++ b/PresentazioneIDS.pptx
@@ -5,7 +5,7 @@
     <p:sldMasterId id="2147483648" r:id="rId1"/>
   </p:sldMasterIdLst>
   <p:notesMasterIdLst>
-    <p:notesMasterId r:id="rId14"/>
+    <p:notesMasterId r:id="rId13"/>
   </p:notesMasterIdLst>
   <p:sldIdLst>
     <p:sldId id="265" r:id="rId2"/>
@@ -16,10 +16,9 @@
     <p:sldId id="263" r:id="rId7"/>
     <p:sldId id="267" r:id="rId8"/>
     <p:sldId id="268" r:id="rId9"/>
-    <p:sldId id="269" r:id="rId10"/>
-    <p:sldId id="270" r:id="rId11"/>
-    <p:sldId id="271" r:id="rId12"/>
-    <p:sldId id="272" r:id="rId13"/>
+    <p:sldId id="270" r:id="rId10"/>
+    <p:sldId id="271" r:id="rId11"/>
+    <p:sldId id="272" r:id="rId12"/>
   </p:sldIdLst>
   <p:sldSz cx="12192000" cy="6858000"/>
   <p:notesSz cx="6858000" cy="9144000"/>
@@ -129,6 +128,7 @@
 <file path=ppt/revisionInfo.xml><?xml version="1.0" encoding="utf-8"?>
 <p1510:revInfo xmlns:a="http://schemas.openxmlformats.org/drawingml/2006/main" xmlns:r="http://schemas.openxmlformats.org/officeDocument/2006/relationships" xmlns:p1510="http://schemas.microsoft.com/office/powerpoint/2015/10/main">
   <p1510:revLst>
+    <p1510:client id="{31275DDF-08D2-9C58-9ECB-2FEF42C3CB26}" v="1" dt="2023-07-17T07:39:55.348"/>
     <p1510:client id="{A88E6143-B678-4048-8754-B9CA894EFB8F}" v="566" dt="2023-07-16T15:22:34.531"/>
     <p1510:client id="{A9492811-72C3-3411-89E0-0F0A97613DD8}" v="479" dt="2023-07-16T22:26:41.143"/>
     <p1510:client id="{B5C310DB-5CCB-5877-6251-A167092D9764}" v="665" dt="2023-07-16T16:10:08.403"/>
@@ -9392,279 +9392,6 @@
                 <a:ea typeface="+mj-lt"/>
                 <a:cs typeface="+mj-lt"/>
               </a:rPr>
-              <a:t>Front-end</a:t>
-            </a:r>
-            <a:endParaRPr lang="it-IT" dirty="0">
-              <a:ea typeface="+mj-lt"/>
-              <a:cs typeface="+mj-lt"/>
-            </a:endParaRPr>
-          </a:p>
-        </p:txBody>
-      </p:sp>
-      <p:pic>
-        <p:nvPicPr>
-          <p:cNvPr id="5" name="Immagine 4">
-            <a:extLst>
-              <a:ext uri="{FF2B5EF4-FFF2-40B4-BE49-F238E27FC236}">
-                <a16:creationId xmlns:a16="http://schemas.microsoft.com/office/drawing/2014/main" id="{893539FE-69A1-7A67-074A-C9724E174A3B}"/>
-              </a:ext>
-            </a:extLst>
-          </p:cNvPr>
-          <p:cNvPicPr>
-            <a:picLocks noChangeAspect="1"/>
-          </p:cNvPicPr>
-          <p:nvPr/>
-        </p:nvPicPr>
-        <p:blipFill>
-          <a:blip r:embed="rId2"/>
-          <a:stretch>
-            <a:fillRect/>
-          </a:stretch>
-        </p:blipFill>
-        <p:spPr>
-          <a:xfrm>
-            <a:off x="10942212" y="5631074"/>
-            <a:ext cx="1249788" cy="1226926"/>
-          </a:xfrm>
-          <a:prstGeom prst="rect">
-            <a:avLst/>
-          </a:prstGeom>
-        </p:spPr>
-      </p:pic>
-      <p:sp>
-        <p:nvSpPr>
-          <p:cNvPr id="4" name="TextBox 3">
-            <a:extLst>
-              <a:ext uri="{FF2B5EF4-FFF2-40B4-BE49-F238E27FC236}">
-                <a16:creationId xmlns:a16="http://schemas.microsoft.com/office/drawing/2014/main" id="{05E01AB3-BE8A-39D8-0095-BCE89376BBD0}"/>
-              </a:ext>
-            </a:extLst>
-          </p:cNvPr>
-          <p:cNvSpPr txBox="1"/>
-          <p:nvPr/>
-        </p:nvSpPr>
-        <p:spPr>
-          <a:xfrm>
-            <a:off x="1147281" y="1524000"/>
-            <a:ext cx="8693648" cy="867930"/>
-          </a:xfrm>
-          <a:prstGeom prst="rect">
-            <a:avLst/>
-          </a:prstGeom>
-          <a:noFill/>
-        </p:spPr>
-        <p:txBody>
-          <a:bodyPr rot="0" spcFirstLastPara="0" vertOverflow="overflow" horzOverflow="overflow" vert="horz" wrap="square" lIns="91440" tIns="45720" rIns="91440" bIns="45720" numCol="1" spcCol="0" rtlCol="0" fromWordArt="0" anchor="t" anchorCtr="0" forceAA="0" compatLnSpc="1">
-            <a:prstTxWarp prst="textNoShape">
-              <a:avLst/>
-            </a:prstTxWarp>
-            <a:spAutoFit/>
-          </a:bodyPr>
-          <a:lstStyle/>
-          <a:p>
-            <a:pPr marL="285750" indent="-285750">
-              <a:lnSpc>
-                <a:spcPct val="90000"/>
-              </a:lnSpc>
-              <a:spcBef>
-                <a:spcPts val="1000"/>
-              </a:spcBef>
-              <a:buFont typeface="Arial"/>
-              <a:buChar char="•"/>
-            </a:pPr>
-            <a:r>
-              <a:rPr lang="en-US" sz="2800" dirty="0">
-                <a:latin typeface="Arial"/>
-                <a:ea typeface="Calibri" panose="020F0502020204030204"/>
-                <a:cs typeface="Arial"/>
-              </a:rPr>
-              <a:t>Per </a:t>
-            </a:r>
-            <a:r>
-              <a:rPr lang="en-US" sz="2800" dirty="0" err="1">
-                <a:latin typeface="Arial"/>
-                <a:ea typeface="Calibri" panose="020F0502020204030204"/>
-                <a:cs typeface="Arial"/>
-              </a:rPr>
-              <a:t>realizzare</a:t>
-            </a:r>
-            <a:r>
-              <a:rPr lang="en-US" sz="2800" dirty="0">
-                <a:latin typeface="Arial"/>
-                <a:ea typeface="Calibri" panose="020F0502020204030204"/>
-                <a:cs typeface="Arial"/>
-              </a:rPr>
-              <a:t> la </a:t>
-            </a:r>
-            <a:r>
-              <a:rPr lang="en-US" sz="2800" dirty="0" err="1">
-                <a:latin typeface="Arial"/>
-                <a:ea typeface="Calibri" panose="020F0502020204030204"/>
-                <a:cs typeface="Arial"/>
-              </a:rPr>
-              <a:t>parte</a:t>
-            </a:r>
-            <a:r>
-              <a:rPr lang="en-US" sz="2800" dirty="0">
-                <a:latin typeface="Arial"/>
-                <a:ea typeface="Calibri" panose="020F0502020204030204"/>
-                <a:cs typeface="Arial"/>
-              </a:rPr>
-              <a:t> di </a:t>
-            </a:r>
-            <a:r>
-              <a:rPr lang="en-US" sz="2800" dirty="0" err="1">
-                <a:latin typeface="Arial"/>
-                <a:ea typeface="Calibri" panose="020F0502020204030204"/>
-                <a:cs typeface="Arial"/>
-              </a:rPr>
-              <a:t>visaulizzazione</a:t>
-            </a:r>
-            <a:r>
-              <a:rPr lang="en-US" sz="2800" dirty="0">
-                <a:latin typeface="Arial"/>
-                <a:ea typeface="Calibri" panose="020F0502020204030204"/>
-                <a:cs typeface="Arial"/>
-              </a:rPr>
-              <a:t> </a:t>
-            </a:r>
-            <a:r>
-              <a:rPr lang="en-US" sz="2800" dirty="0" err="1">
-                <a:latin typeface="Arial"/>
-                <a:ea typeface="Calibri" panose="020F0502020204030204"/>
-                <a:cs typeface="Arial"/>
-              </a:rPr>
-              <a:t>abbiamo</a:t>
-            </a:r>
-            <a:r>
-              <a:rPr lang="en-US" sz="2800" dirty="0">
-                <a:latin typeface="Arial"/>
-                <a:ea typeface="Calibri" panose="020F0502020204030204"/>
-                <a:cs typeface="Arial"/>
-              </a:rPr>
-              <a:t> </a:t>
-            </a:r>
-            <a:r>
-              <a:rPr lang="en-US" sz="2800" dirty="0" err="1">
-                <a:latin typeface="Arial"/>
-                <a:ea typeface="Calibri" panose="020F0502020204030204"/>
-                <a:cs typeface="Arial"/>
-              </a:rPr>
-              <a:t>utilizzato</a:t>
-            </a:r>
-            <a:r>
-              <a:rPr lang="en-US" sz="2800" dirty="0">
-                <a:latin typeface="Arial"/>
-                <a:ea typeface="Calibri" panose="020F0502020204030204"/>
-                <a:cs typeface="Arial"/>
-              </a:rPr>
-              <a:t> il framework Angular, </a:t>
-            </a:r>
-            <a:r>
-              <a:rPr lang="en-US" sz="2800" dirty="0" err="1">
-                <a:latin typeface="Arial"/>
-                <a:ea typeface="Calibri" panose="020F0502020204030204"/>
-                <a:cs typeface="Arial"/>
-              </a:rPr>
-              <a:t>fornito</a:t>
-            </a:r>
-            <a:r>
-              <a:rPr lang="en-US" sz="2800" dirty="0">
-                <a:latin typeface="Arial"/>
-                <a:ea typeface="Calibri" panose="020F0502020204030204"/>
-                <a:cs typeface="Arial"/>
-              </a:rPr>
-              <a:t> da Google. </a:t>
-            </a:r>
-          </a:p>
-        </p:txBody>
-      </p:sp>
-      <p:pic>
-        <p:nvPicPr>
-          <p:cNvPr id="3" name="Picture 5" descr="A red and white logo&#10;&#10;Description automatically generated">
-            <a:extLst>
-              <a:ext uri="{FF2B5EF4-FFF2-40B4-BE49-F238E27FC236}">
-                <a16:creationId xmlns:a16="http://schemas.microsoft.com/office/drawing/2014/main" id="{1386E366-C95B-50B7-4785-71CBA2A89AC2}"/>
-              </a:ext>
-            </a:extLst>
-          </p:cNvPr>
-          <p:cNvPicPr>
-            <a:picLocks noChangeAspect="1"/>
-          </p:cNvPicPr>
-          <p:nvPr/>
-        </p:nvPicPr>
-        <p:blipFill>
-          <a:blip r:embed="rId3"/>
-          <a:stretch>
-            <a:fillRect/>
-          </a:stretch>
-        </p:blipFill>
-        <p:spPr>
-          <a:xfrm>
-            <a:off x="4594058" y="2588795"/>
-            <a:ext cx="2743200" cy="2743200"/>
-          </a:xfrm>
-          <a:prstGeom prst="rect">
-            <a:avLst/>
-          </a:prstGeom>
-        </p:spPr>
-      </p:pic>
-    </p:spTree>
-    <p:extLst>
-      <p:ext uri="{BB962C8B-B14F-4D97-AF65-F5344CB8AC3E}">
-        <p14:creationId xmlns:p14="http://schemas.microsoft.com/office/powerpoint/2010/main" val="1124168476"/>
-      </p:ext>
-    </p:extLst>
-  </p:cSld>
-  <p:clrMapOvr>
-    <a:masterClrMapping/>
-  </p:clrMapOvr>
-</p:sld>
-</file>
-
-<file path=ppt/slides/slide11.xml><?xml version="1.0" encoding="utf-8"?>
-<p:sld xmlns:a="http://schemas.openxmlformats.org/drawingml/2006/main" xmlns:r="http://schemas.openxmlformats.org/officeDocument/2006/relationships" xmlns:p="http://schemas.openxmlformats.org/presentationml/2006/main">
-  <p:cSld>
-    <p:spTree>
-      <p:nvGrpSpPr>
-        <p:cNvPr id="1" name=""/>
-        <p:cNvGrpSpPr/>
-        <p:nvPr/>
-      </p:nvGrpSpPr>
-      <p:grpSpPr>
-        <a:xfrm>
-          <a:off x="0" y="0"/>
-          <a:ext cx="0" cy="0"/>
-          <a:chOff x="0" y="0"/>
-          <a:chExt cx="0" cy="0"/>
-        </a:xfrm>
-      </p:grpSpPr>
-      <p:sp>
-        <p:nvSpPr>
-          <p:cNvPr id="2" name="Titolo 1">
-            <a:extLst>
-              <a:ext uri="{FF2B5EF4-FFF2-40B4-BE49-F238E27FC236}">
-                <a16:creationId xmlns:a16="http://schemas.microsoft.com/office/drawing/2014/main" id="{1E150AE9-1CAE-6AF4-0B8F-7CE27CE45350}"/>
-              </a:ext>
-            </a:extLst>
-          </p:cNvPr>
-          <p:cNvSpPr>
-            <a:spLocks noGrp="1"/>
-          </p:cNvSpPr>
-          <p:nvPr>
-            <p:ph type="title"/>
-          </p:nvPr>
-        </p:nvSpPr>
-        <p:spPr/>
-        <p:txBody>
-          <a:bodyPr/>
-          <a:lstStyle/>
-          <a:p>
-            <a:r>
-              <a:rPr lang="en-US" dirty="0">
-                <a:ea typeface="+mj-lt"/>
-                <a:cs typeface="+mj-lt"/>
-              </a:rPr>
               <a:t>Bootstrap</a:t>
             </a:r>
             <a:endParaRPr lang="en-US" dirty="0"/>
@@ -9893,7 +9620,7 @@
 </p:sld>
 </file>
 
-<file path=ppt/slides/slide12.xml><?xml version="1.0" encoding="utf-8"?>
+<file path=ppt/slides/slide11.xml><?xml version="1.0" encoding="utf-8"?>
 <p:sld xmlns:a="http://schemas.openxmlformats.org/drawingml/2006/main" xmlns:r="http://schemas.openxmlformats.org/officeDocument/2006/relationships" xmlns:p="http://schemas.openxmlformats.org/presentationml/2006/main">
   <p:cSld>
     <p:spTree>
@@ -12407,10 +12134,10 @@
       </p:grpSpPr>
       <p:sp>
         <p:nvSpPr>
-          <p:cNvPr id="2" name="Title 1">
+          <p:cNvPr id="2" name="Titolo 1">
             <a:extLst>
               <a:ext uri="{FF2B5EF4-FFF2-40B4-BE49-F238E27FC236}">
-                <a16:creationId xmlns:a16="http://schemas.microsoft.com/office/drawing/2014/main" id="{9DDF513C-ED87-BA0F-B72B-24B8DF6F5E11}"/>
+                <a16:creationId xmlns:a16="http://schemas.microsoft.com/office/drawing/2014/main" id="{1E150AE9-1CAE-6AF4-0B8F-7CE27CE45350}"/>
               </a:ext>
             </a:extLst>
           </p:cNvPr>
@@ -12428,137 +12155,230 @@
           <a:p>
             <a:r>
               <a:rPr lang="en-US" dirty="0">
-                <a:ea typeface="Calibri Light"/>
-                <a:cs typeface="Calibri Light"/>
+                <a:ea typeface="+mj-lt"/>
+                <a:cs typeface="+mj-lt"/>
               </a:rPr>
               <a:t>Front-end</a:t>
             </a:r>
-            <a:endParaRPr lang="en-US" dirty="0"/>
+            <a:endParaRPr lang="it-IT" dirty="0">
+              <a:ea typeface="+mj-lt"/>
+              <a:cs typeface="+mj-lt"/>
+            </a:endParaRPr>
           </a:p>
         </p:txBody>
       </p:sp>
+      <p:pic>
+        <p:nvPicPr>
+          <p:cNvPr id="5" name="Immagine 4">
+            <a:extLst>
+              <a:ext uri="{FF2B5EF4-FFF2-40B4-BE49-F238E27FC236}">
+                <a16:creationId xmlns:a16="http://schemas.microsoft.com/office/drawing/2014/main" id="{893539FE-69A1-7A67-074A-C9724E174A3B}"/>
+              </a:ext>
+            </a:extLst>
+          </p:cNvPr>
+          <p:cNvPicPr>
+            <a:picLocks noChangeAspect="1"/>
+          </p:cNvPicPr>
+          <p:nvPr/>
+        </p:nvPicPr>
+        <p:blipFill>
+          <a:blip r:embed="rId2"/>
+          <a:stretch>
+            <a:fillRect/>
+          </a:stretch>
+        </p:blipFill>
+        <p:spPr>
+          <a:xfrm>
+            <a:off x="10942212" y="5631074"/>
+            <a:ext cx="1249788" cy="1226926"/>
+          </a:xfrm>
+          <a:prstGeom prst="rect">
+            <a:avLst/>
+          </a:prstGeom>
+        </p:spPr>
+      </p:pic>
       <p:sp>
         <p:nvSpPr>
-          <p:cNvPr id="3" name="Content Placeholder 2">
+          <p:cNvPr id="4" name="TextBox 3">
             <a:extLst>
               <a:ext uri="{FF2B5EF4-FFF2-40B4-BE49-F238E27FC236}">
-                <a16:creationId xmlns:a16="http://schemas.microsoft.com/office/drawing/2014/main" id="{0D0F3335-E9D6-3054-3086-4C3009F363AD}"/>
+                <a16:creationId xmlns:a16="http://schemas.microsoft.com/office/drawing/2014/main" id="{05E01AB3-BE8A-39D8-0095-BCE89376BBD0}"/>
               </a:ext>
             </a:extLst>
           </p:cNvPr>
-          <p:cNvSpPr>
-            <a:spLocks noGrp="1"/>
-          </p:cNvSpPr>
-          <p:nvPr>
-            <p:ph idx="1"/>
-          </p:nvPr>
+          <p:cNvSpPr txBox="1"/>
+          <p:nvPr/>
         </p:nvSpPr>
-        <p:spPr/>
+        <p:spPr>
+          <a:xfrm>
+            <a:off x="1147281" y="1524000"/>
+            <a:ext cx="8693648" cy="867930"/>
+          </a:xfrm>
+          <a:prstGeom prst="rect">
+            <a:avLst/>
+          </a:prstGeom>
+          <a:noFill/>
+        </p:spPr>
         <p:txBody>
-          <a:bodyPr vert="horz" lIns="91440" tIns="45720" rIns="91440" bIns="45720" rtlCol="0" anchor="t">
-            <a:normAutofit/>
+          <a:bodyPr rot="0" spcFirstLastPara="0" vertOverflow="overflow" horzOverflow="overflow" vert="horz" wrap="square" lIns="91440" tIns="45720" rIns="91440" bIns="45720" numCol="1" spcCol="0" rtlCol="0" fromWordArt="0" anchor="t" anchorCtr="0" forceAA="0" compatLnSpc="1">
+            <a:prstTxWarp prst="textNoShape">
+              <a:avLst/>
+            </a:prstTxWarp>
+            <a:spAutoFit/>
           </a:bodyPr>
           <a:lstStyle/>
           <a:p>
-            <a:r>
-              <a:rPr lang="en-US" dirty="0">
-                <a:ea typeface="Calibri"/>
-                <a:cs typeface="Calibri"/>
+            <a:pPr marL="285750" indent="-285750">
+              <a:lnSpc>
+                <a:spcPct val="90000"/>
+              </a:lnSpc>
+              <a:spcBef>
+                <a:spcPts val="1000"/>
+              </a:spcBef>
+              <a:buFont typeface="Arial"/>
+              <a:buChar char="•"/>
+            </a:pPr>
+            <a:r>
+              <a:rPr lang="en-US" sz="2800" dirty="0">
+                <a:latin typeface="Arial"/>
+                <a:ea typeface="Calibri" panose="020F0502020204030204"/>
+                <a:cs typeface="Arial"/>
               </a:rPr>
-              <a:t>Per </a:t>
-            </a:r>
-            <a:r>
-              <a:rPr lang="en-US" dirty="0" err="1">
-                <a:ea typeface="Calibri"/>
-                <a:cs typeface="Calibri"/>
+              <a:t>Per </a:t>
+            </a:r>
+            <a:r>
+              <a:rPr lang="en-US" sz="2800" dirty="0" err="1">
+                <a:latin typeface="Arial"/>
+                <a:ea typeface="Calibri" panose="020F0502020204030204"/>
+                <a:cs typeface="Arial"/>
               </a:rPr>
               <a:t>realizzare</a:t>
             </a:r>
             <a:r>
-              <a:rPr lang="en-US" dirty="0">
-                <a:ea typeface="Calibri"/>
-                <a:cs typeface="Calibri"/>
+              <a:rPr lang="en-US" sz="2800" dirty="0">
+                <a:latin typeface="Arial"/>
+                <a:ea typeface="Calibri" panose="020F0502020204030204"/>
+                <a:cs typeface="Arial"/>
               </a:rPr>
-              <a:t> la </a:t>
-            </a:r>
-            <a:r>
-              <a:rPr lang="en-US" dirty="0" err="1">
-                <a:ea typeface="Calibri"/>
-                <a:cs typeface="Calibri"/>
+              <a:t> la </a:t>
+            </a:r>
+            <a:r>
+              <a:rPr lang="en-US" sz="2800" dirty="0" err="1">
+                <a:latin typeface="Arial"/>
+                <a:ea typeface="Calibri" panose="020F0502020204030204"/>
+                <a:cs typeface="Arial"/>
               </a:rPr>
               <a:t>parte</a:t>
             </a:r>
             <a:r>
-              <a:rPr lang="en-US" dirty="0">
-                <a:ea typeface="Calibri"/>
-                <a:cs typeface="Calibri"/>
+              <a:rPr lang="en-US" sz="2800" dirty="0">
+                <a:latin typeface="Arial"/>
+                <a:ea typeface="Calibri" panose="020F0502020204030204"/>
+                <a:cs typeface="Arial"/>
               </a:rPr>
-              <a:t> di </a:t>
-            </a:r>
-            <a:r>
-              <a:rPr lang="en-US" dirty="0" err="1">
-                <a:ea typeface="Calibri"/>
-                <a:cs typeface="Calibri"/>
+              <a:t> di </a:t>
+            </a:r>
+            <a:r>
+              <a:rPr lang="en-US" sz="2800" dirty="0" err="1">
+                <a:latin typeface="Arial"/>
+                <a:ea typeface="Calibri" panose="020F0502020204030204"/>
+                <a:cs typeface="Arial"/>
               </a:rPr>
               <a:t>visaulizzazione</a:t>
             </a:r>
             <a:r>
-              <a:rPr lang="en-US" dirty="0">
-                <a:ea typeface="Calibri"/>
-                <a:cs typeface="Calibri"/>
+              <a:rPr lang="en-US" sz="2800" dirty="0">
+                <a:latin typeface="Arial"/>
+                <a:ea typeface="Calibri" panose="020F0502020204030204"/>
+                <a:cs typeface="Arial"/>
               </a:rPr>
               <a:t> </a:t>
             </a:r>
             <a:r>
-              <a:rPr lang="en-US" dirty="0" err="1">
-                <a:ea typeface="Calibri"/>
-                <a:cs typeface="Calibri"/>
+              <a:rPr lang="en-US" sz="2800" dirty="0" err="1">
+                <a:latin typeface="Arial"/>
+                <a:ea typeface="Calibri" panose="020F0502020204030204"/>
+                <a:cs typeface="Arial"/>
               </a:rPr>
               <a:t>abbiamo</a:t>
             </a:r>
             <a:r>
-              <a:rPr lang="en-US" dirty="0">
-                <a:ea typeface="Calibri"/>
-                <a:cs typeface="Calibri"/>
+              <a:rPr lang="en-US" sz="2800" dirty="0">
+                <a:latin typeface="Arial"/>
+                <a:ea typeface="Calibri" panose="020F0502020204030204"/>
+                <a:cs typeface="Arial"/>
               </a:rPr>
-              <a:t> </a:t>
-            </a:r>
-            <a:r>
-              <a:rPr lang="en-US" dirty="0" err="1">
-                <a:ea typeface="Calibri"/>
-                <a:cs typeface="Calibri"/>
+              <a:t> </a:t>
+            </a:r>
+            <a:r>
+              <a:rPr lang="en-US" sz="2800" dirty="0" err="1">
+                <a:latin typeface="Arial"/>
+                <a:ea typeface="Calibri" panose="020F0502020204030204"/>
+                <a:cs typeface="Arial"/>
               </a:rPr>
               <a:t>utilizzato</a:t>
             </a:r>
             <a:r>
-              <a:rPr lang="en-US" dirty="0">
-                <a:ea typeface="Calibri"/>
-                <a:cs typeface="Calibri"/>
+              <a:rPr lang="en-US" sz="2800" dirty="0">
+                <a:latin typeface="Arial"/>
+                <a:ea typeface="Calibri" panose="020F0502020204030204"/>
+                <a:cs typeface="Arial"/>
               </a:rPr>
-              <a:t> il framework Angular, </a:t>
-            </a:r>
-            <a:r>
-              <a:rPr lang="en-US" dirty="0" err="1">
-                <a:ea typeface="Calibri"/>
-                <a:cs typeface="Calibri"/>
+              <a:t> il framework Angular, </a:t>
+            </a:r>
+            <a:r>
+              <a:rPr lang="en-US" sz="2800" dirty="0" err="1">
+                <a:latin typeface="Arial"/>
+                <a:ea typeface="Calibri" panose="020F0502020204030204"/>
+                <a:cs typeface="Arial"/>
               </a:rPr>
               <a:t>fornito</a:t>
             </a:r>
             <a:r>
-              <a:rPr lang="en-US" dirty="0">
-                <a:ea typeface="Calibri"/>
-                <a:cs typeface="Calibri"/>
+              <a:rPr lang="en-US" sz="2800" dirty="0">
+                <a:latin typeface="Arial"/>
+                <a:ea typeface="Calibri" panose="020F0502020204030204"/>
+                <a:cs typeface="Arial"/>
               </a:rPr>
-              <a:t> da Google. </a:t>
-            </a:r>
-            <a:endParaRPr lang="en-US" dirty="0"/>
+              <a:t> da Google. </a:t>
+            </a:r>
           </a:p>
         </p:txBody>
       </p:sp>
+      <p:pic>
+        <p:nvPicPr>
+          <p:cNvPr id="3" name="Picture 5" descr="A red and white logo&#10;&#10;Description automatically generated">
+            <a:extLst>
+              <a:ext uri="{FF2B5EF4-FFF2-40B4-BE49-F238E27FC236}">
+                <a16:creationId xmlns:a16="http://schemas.microsoft.com/office/drawing/2014/main" id="{1386E366-C95B-50B7-4785-71CBA2A89AC2}"/>
+              </a:ext>
+            </a:extLst>
+          </p:cNvPr>
+          <p:cNvPicPr>
+            <a:picLocks noChangeAspect="1"/>
+          </p:cNvPicPr>
+          <p:nvPr/>
+        </p:nvPicPr>
+        <p:blipFill>
+          <a:blip r:embed="rId3"/>
+          <a:stretch>
+            <a:fillRect/>
+          </a:stretch>
+        </p:blipFill>
+        <p:spPr>
+          <a:xfrm>
+            <a:off x="4594058" y="2588795"/>
+            <a:ext cx="2743200" cy="2743200"/>
+          </a:xfrm>
+          <a:prstGeom prst="rect">
+            <a:avLst/>
+          </a:prstGeom>
+        </p:spPr>
+      </p:pic>
     </p:spTree>
     <p:extLst>
       <p:ext uri="{BB962C8B-B14F-4D97-AF65-F5344CB8AC3E}">
-        <p14:creationId xmlns:p14="http://schemas.microsoft.com/office/powerpoint/2010/main" val="277348839"/>
+        <p14:creationId xmlns:p14="http://schemas.microsoft.com/office/powerpoint/2010/main" val="1124168476"/>
       </p:ext>
     </p:extLst>
   </p:cSld>
